--- a/static/testwork/mingde-motion.pptx
+++ b/static/testwork/mingde-motion.pptx
@@ -7015,20 +7015,20 @@
       </p:par>
     </p:tnLst>
     <p:bldLst>
-      <p:bldP spid="8" grpId="1" build="all"/>
-      <p:bldP spid="9" grpId="1" build="all"/>
-      <p:bldP spid="11" grpId="2" build="all"/>
-      <p:bldP spid="12" grpId="2" build="all"/>
-      <p:bldP spid="14" grpId="3" build="all"/>
-      <p:bldP spid="15" grpId="3" build="all"/>
-      <p:bldP spid="17" grpId="4" build="all"/>
-      <p:bldP spid="18" grpId="4" build="all"/>
-      <p:bldP spid="20" grpId="5" build="all"/>
-      <p:bldP spid="21" grpId="5" build="all"/>
-      <p:bldP spid="23" grpId="6" build="all"/>
-      <p:bldP spid="24" grpId="6" build="all"/>
-      <p:bldP spid="26" grpId="7" build="all"/>
-      <p:bldP spid="27" grpId="7" build="all"/>
+      <p:bldP spid="8" grpId="1" build="allAtOnce"/>
+      <p:bldP spid="9" grpId="1" build="allAtOnce"/>
+      <p:bldP spid="11" grpId="2" build="allAtOnce"/>
+      <p:bldP spid="12" grpId="2" build="allAtOnce"/>
+      <p:bldP spid="14" grpId="3" build="allAtOnce"/>
+      <p:bldP spid="15" grpId="3" build="allAtOnce"/>
+      <p:bldP spid="17" grpId="4" build="allAtOnce"/>
+      <p:bldP spid="18" grpId="4" build="allAtOnce"/>
+      <p:bldP spid="20" grpId="5" build="allAtOnce"/>
+      <p:bldP spid="21" grpId="5" build="allAtOnce"/>
+      <p:bldP spid="23" grpId="6" build="allAtOnce"/>
+      <p:bldP spid="24" grpId="6" build="allAtOnce"/>
+      <p:bldP spid="26" grpId="7" build="allAtOnce"/>
+      <p:bldP spid="27" grpId="7" build="allAtOnce"/>
     </p:bldLst>
   </p:timing>
 </p:sld>
@@ -10047,27 +10047,27 @@
       </p:par>
     </p:tnLst>
     <p:bldLst>
-      <p:bldP spid="9" grpId="1" build="all"/>
-      <p:bldP spid="10" grpId="1" build="all"/>
-      <p:bldP spid="11" grpId="1" build="all"/>
-      <p:bldP spid="13" grpId="2" build="all"/>
-      <p:bldP spid="14" grpId="2" build="all"/>
-      <p:bldP spid="15" grpId="2" build="all"/>
-      <p:bldP spid="17" grpId="3" build="all"/>
-      <p:bldP spid="18" grpId="3" build="all"/>
-      <p:bldP spid="19" grpId="3" build="all"/>
-      <p:bldP spid="21" grpId="4" build="all"/>
-      <p:bldP spid="22" grpId="4" build="all"/>
-      <p:bldP spid="23" grpId="4" build="all"/>
-      <p:bldP spid="25" grpId="5" build="all"/>
-      <p:bldP spid="26" grpId="5" build="all"/>
-      <p:bldP spid="27" grpId="5" build="all"/>
-      <p:bldP spid="29" grpId="6" build="all"/>
-      <p:bldP spid="30" grpId="6" build="all"/>
-      <p:bldP spid="31" grpId="6" build="all"/>
-      <p:bldP spid="33" grpId="7" build="all"/>
-      <p:bldP spid="34" grpId="7" build="all"/>
-      <p:bldP spid="35" grpId="7" build="all"/>
+      <p:bldP spid="9" grpId="1" build="allAtOnce"/>
+      <p:bldP spid="10" grpId="1" build="allAtOnce"/>
+      <p:bldP spid="11" grpId="1" build="allAtOnce"/>
+      <p:bldP spid="13" grpId="2" build="allAtOnce"/>
+      <p:bldP spid="14" grpId="2" build="allAtOnce"/>
+      <p:bldP spid="15" grpId="2" build="allAtOnce"/>
+      <p:bldP spid="17" grpId="3" build="allAtOnce"/>
+      <p:bldP spid="18" grpId="3" build="allAtOnce"/>
+      <p:bldP spid="19" grpId="3" build="allAtOnce"/>
+      <p:bldP spid="21" grpId="4" build="allAtOnce"/>
+      <p:bldP spid="22" grpId="4" build="allAtOnce"/>
+      <p:bldP spid="23" grpId="4" build="allAtOnce"/>
+      <p:bldP spid="25" grpId="5" build="allAtOnce"/>
+      <p:bldP spid="26" grpId="5" build="allAtOnce"/>
+      <p:bldP spid="27" grpId="5" build="allAtOnce"/>
+      <p:bldP spid="29" grpId="6" build="allAtOnce"/>
+      <p:bldP spid="30" grpId="6" build="allAtOnce"/>
+      <p:bldP spid="31" grpId="6" build="allAtOnce"/>
+      <p:bldP spid="33" grpId="7" build="allAtOnce"/>
+      <p:bldP spid="34" grpId="7" build="allAtOnce"/>
+      <p:bldP spid="35" grpId="7" build="allAtOnce"/>
     </p:bldLst>
   </p:timing>
 </p:sld>
@@ -11720,15 +11720,15 @@
       </p:par>
     </p:tnLst>
     <p:bldLst>
-      <p:bldP spid="8" grpId="1" build="all"/>
-      <p:bldP spid="9" grpId="1" build="all"/>
-      <p:bldP spid="10" grpId="1" build="all"/>
-      <p:bldP spid="12" grpId="2" build="all"/>
-      <p:bldP spid="13" grpId="2" build="all"/>
-      <p:bldP spid="14" grpId="2" build="all"/>
-      <p:bldP spid="16" grpId="3" build="all"/>
-      <p:bldP spid="17" grpId="3" build="all"/>
-      <p:bldP spid="18" grpId="3" build="all"/>
+      <p:bldP spid="8" grpId="1" build="allAtOnce"/>
+      <p:bldP spid="9" grpId="1" build="allAtOnce"/>
+      <p:bldP spid="10" grpId="1" build="allAtOnce"/>
+      <p:bldP spid="12" grpId="2" build="allAtOnce"/>
+      <p:bldP spid="13" grpId="2" build="allAtOnce"/>
+      <p:bldP spid="14" grpId="2" build="allAtOnce"/>
+      <p:bldP spid="16" grpId="3" build="allAtOnce"/>
+      <p:bldP spid="17" grpId="3" build="allAtOnce"/>
+      <p:bldP spid="18" grpId="3" build="allAtOnce"/>
     </p:bldLst>
   </p:timing>
 </p:sld>
@@ -13964,21 +13964,21 @@
       </p:par>
     </p:tnLst>
     <p:bldLst>
-      <p:bldP spid="8" grpId="1" build="all"/>
-      <p:bldP spid="9" grpId="1" build="all"/>
-      <p:bldP spid="10" grpId="1" build="all"/>
-      <p:bldP spid="12" grpId="2" build="all"/>
-      <p:bldP spid="13" grpId="2" build="all"/>
-      <p:bldP spid="14" grpId="2" build="all"/>
-      <p:bldP spid="16" grpId="3" build="all"/>
-      <p:bldP spid="17" grpId="3" build="all"/>
-      <p:bldP spid="18" grpId="3" build="all"/>
-      <p:bldP spid="20" grpId="4" build="all"/>
-      <p:bldP spid="21" grpId="4" build="all"/>
-      <p:bldP spid="22" grpId="4" build="all"/>
-      <p:bldP spid="24" grpId="5" build="all"/>
-      <p:bldP spid="25" grpId="5" build="all"/>
-      <p:bldP spid="26" grpId="5" build="all"/>
+      <p:bldP spid="8" grpId="1" build="allAtOnce"/>
+      <p:bldP spid="9" grpId="1" build="allAtOnce"/>
+      <p:bldP spid="10" grpId="1" build="allAtOnce"/>
+      <p:bldP spid="12" grpId="2" build="allAtOnce"/>
+      <p:bldP spid="13" grpId="2" build="allAtOnce"/>
+      <p:bldP spid="14" grpId="2" build="allAtOnce"/>
+      <p:bldP spid="16" grpId="3" build="allAtOnce"/>
+      <p:bldP spid="17" grpId="3" build="allAtOnce"/>
+      <p:bldP spid="18" grpId="3" build="allAtOnce"/>
+      <p:bldP spid="20" grpId="4" build="allAtOnce"/>
+      <p:bldP spid="21" grpId="4" build="allAtOnce"/>
+      <p:bldP spid="22" grpId="4" build="allAtOnce"/>
+      <p:bldP spid="24" grpId="5" build="allAtOnce"/>
+      <p:bldP spid="25" grpId="5" build="allAtOnce"/>
+      <p:bldP spid="26" grpId="5" build="allAtOnce"/>
     </p:bldLst>
   </p:timing>
 </p:sld>
@@ -15490,14 +15490,14 @@
       </p:par>
     </p:tnLst>
     <p:bldLst>
-      <p:bldP spid="8" grpId="1" build="all"/>
-      <p:bldP spid="9" grpId="1" build="all"/>
-      <p:bldP spid="11" grpId="2" build="all"/>
-      <p:bldP spid="12" grpId="2" build="all"/>
-      <p:bldP spid="14" grpId="3" build="all"/>
-      <p:bldP spid="15" grpId="3" build="all"/>
-      <p:bldP spid="17" grpId="4" build="all"/>
-      <p:bldP spid="18" grpId="4" build="all"/>
+      <p:bldP spid="8" grpId="1" build="allAtOnce"/>
+      <p:bldP spid="9" grpId="1" build="allAtOnce"/>
+      <p:bldP spid="11" grpId="2" build="allAtOnce"/>
+      <p:bldP spid="12" grpId="2" build="allAtOnce"/>
+      <p:bldP spid="14" grpId="3" build="allAtOnce"/>
+      <p:bldP spid="15" grpId="3" build="allAtOnce"/>
+      <p:bldP spid="17" grpId="4" build="allAtOnce"/>
+      <p:bldP spid="18" grpId="4" build="allAtOnce"/>
     </p:bldLst>
   </p:timing>
 </p:sld>
@@ -16958,14 +16958,14 @@
       </p:par>
     </p:tnLst>
     <p:bldLst>
-      <p:bldP spid="7" grpId="1" build="all"/>
-      <p:bldP spid="8" grpId="1" build="all"/>
-      <p:bldP spid="9" grpId="2" build="all"/>
-      <p:bldP spid="10" grpId="2" build="all"/>
-      <p:bldP spid="11" grpId="3" build="all"/>
-      <p:bldP spid="12" grpId="3" build="all"/>
-      <p:bldP spid="13" grpId="4" build="all"/>
-      <p:bldP spid="14" grpId="4" build="all"/>
+      <p:bldP spid="7" grpId="1" build="allAtOnce"/>
+      <p:bldP spid="8" grpId="1" build="allAtOnce"/>
+      <p:bldP spid="9" grpId="2" build="allAtOnce"/>
+      <p:bldP spid="10" grpId="2" build="allAtOnce"/>
+      <p:bldP spid="11" grpId="3" build="allAtOnce"/>
+      <p:bldP spid="12" grpId="3" build="allAtOnce"/>
+      <p:bldP spid="13" grpId="4" build="allAtOnce"/>
+      <p:bldP spid="14" grpId="4" build="allAtOnce"/>
     </p:bldLst>
   </p:timing>
 </p:sld>
@@ -18550,14 +18550,14 @@
       </p:par>
     </p:tnLst>
     <p:bldLst>
-      <p:bldP spid="9" grpId="1" build="all"/>
-      <p:bldP spid="10" grpId="1" build="all"/>
-      <p:bldP spid="12" grpId="2" build="all"/>
-      <p:bldP spid="13" grpId="2" build="all"/>
-      <p:bldP spid="15" grpId="3" build="all"/>
-      <p:bldP spid="16" grpId="3" build="all"/>
-      <p:bldP spid="18" grpId="4" build="all"/>
-      <p:bldP spid="19" grpId="4" build="all"/>
+      <p:bldP spid="9" grpId="1" build="allAtOnce"/>
+      <p:bldP spid="10" grpId="1" build="allAtOnce"/>
+      <p:bldP spid="12" grpId="2" build="allAtOnce"/>
+      <p:bldP spid="13" grpId="2" build="allAtOnce"/>
+      <p:bldP spid="15" grpId="3" build="allAtOnce"/>
+      <p:bldP spid="16" grpId="3" build="allAtOnce"/>
+      <p:bldP spid="18" grpId="4" build="allAtOnce"/>
+      <p:bldP spid="19" grpId="4" build="allAtOnce"/>
     </p:bldLst>
   </p:timing>
 </p:sld>
@@ -20115,14 +20115,14 @@
       </p:par>
     </p:tnLst>
     <p:bldLst>
-      <p:bldP spid="8" grpId="1" build="all"/>
-      <p:bldP spid="9" grpId="1" build="all"/>
-      <p:bldP spid="11" grpId="2" build="all"/>
-      <p:bldP spid="12" grpId="2" build="all"/>
-      <p:bldP spid="14" grpId="3" build="all"/>
-      <p:bldP spid="15" grpId="3" build="all"/>
-      <p:bldP spid="17" grpId="4" build="all"/>
-      <p:bldP spid="18" grpId="4" build="all"/>
+      <p:bldP spid="8" grpId="1" build="allAtOnce"/>
+      <p:bldP spid="9" grpId="1" build="allAtOnce"/>
+      <p:bldP spid="11" grpId="2" build="allAtOnce"/>
+      <p:bldP spid="12" grpId="2" build="allAtOnce"/>
+      <p:bldP spid="14" grpId="3" build="allAtOnce"/>
+      <p:bldP spid="15" grpId="3" build="allAtOnce"/>
+      <p:bldP spid="17" grpId="4" build="allAtOnce"/>
+      <p:bldP spid="18" grpId="4" build="allAtOnce"/>
     </p:bldLst>
   </p:timing>
 </p:sld>
@@ -22119,18 +22119,18 @@
       </p:par>
     </p:tnLst>
     <p:bldLst>
-      <p:bldP spid="8" grpId="1" build="all"/>
-      <p:bldP spid="9" grpId="1" build="all"/>
-      <p:bldP spid="11" grpId="2" build="all"/>
-      <p:bldP spid="12" grpId="2" build="all"/>
-      <p:bldP spid="14" grpId="3" build="all"/>
-      <p:bldP spid="15" grpId="3" build="all"/>
-      <p:bldP spid="17" grpId="4" build="all"/>
-      <p:bldP spid="18" grpId="4" build="all"/>
-      <p:bldP spid="20" grpId="5" build="all"/>
-      <p:bldP spid="21" grpId="5" build="all"/>
-      <p:bldP spid="23" grpId="6" build="all"/>
-      <p:bldP spid="24" grpId="6" build="all"/>
+      <p:bldP spid="8" grpId="1" build="allAtOnce"/>
+      <p:bldP spid="9" grpId="1" build="allAtOnce"/>
+      <p:bldP spid="11" grpId="2" build="allAtOnce"/>
+      <p:bldP spid="12" grpId="2" build="allAtOnce"/>
+      <p:bldP spid="14" grpId="3" build="allAtOnce"/>
+      <p:bldP spid="15" grpId="3" build="allAtOnce"/>
+      <p:bldP spid="17" grpId="4" build="allAtOnce"/>
+      <p:bldP spid="18" grpId="4" build="allAtOnce"/>
+      <p:bldP spid="20" grpId="5" build="allAtOnce"/>
+      <p:bldP spid="21" grpId="5" build="allAtOnce"/>
+      <p:bldP spid="23" grpId="6" build="allAtOnce"/>
+      <p:bldP spid="24" grpId="6" build="allAtOnce"/>
     </p:bldLst>
   </p:timing>
 </p:sld>
@@ -24111,18 +24111,18 @@
       </p:par>
     </p:tnLst>
     <p:bldLst>
-      <p:bldP spid="9" grpId="1" build="all"/>
-      <p:bldP spid="10" grpId="1" build="all"/>
-      <p:bldP spid="11" grpId="1" build="all"/>
-      <p:bldP spid="13" grpId="2" build="all"/>
-      <p:bldP spid="14" grpId="2" build="all"/>
-      <p:bldP spid="15" grpId="2" build="all"/>
-      <p:bldP spid="17" grpId="3" build="all"/>
-      <p:bldP spid="18" grpId="3" build="all"/>
-      <p:bldP spid="19" grpId="3" build="all"/>
-      <p:bldP spid="21" grpId="4" build="all"/>
-      <p:bldP spid="22" grpId="4" build="all"/>
-      <p:bldP spid="23" grpId="4" build="all"/>
+      <p:bldP spid="9" grpId="1" build="allAtOnce"/>
+      <p:bldP spid="10" grpId="1" build="allAtOnce"/>
+      <p:bldP spid="11" grpId="1" build="allAtOnce"/>
+      <p:bldP spid="13" grpId="2" build="allAtOnce"/>
+      <p:bldP spid="14" grpId="2" build="allAtOnce"/>
+      <p:bldP spid="15" grpId="2" build="allAtOnce"/>
+      <p:bldP spid="17" grpId="3" build="allAtOnce"/>
+      <p:bldP spid="18" grpId="3" build="allAtOnce"/>
+      <p:bldP spid="19" grpId="3" build="allAtOnce"/>
+      <p:bldP spid="21" grpId="4" build="allAtOnce"/>
+      <p:bldP spid="22" grpId="4" build="allAtOnce"/>
+      <p:bldP spid="23" grpId="4" build="allAtOnce"/>
     </p:bldLst>
   </p:timing>
 </p:sld>
@@ -26504,21 +26504,21 @@
       </p:par>
     </p:tnLst>
     <p:bldLst>
-      <p:bldP spid="10" grpId="1" build="all"/>
-      <p:bldP spid="11" grpId="1" build="all"/>
-      <p:bldP spid="12" grpId="1" build="all"/>
-      <p:bldP spid="14" grpId="2" build="all"/>
-      <p:bldP spid="15" grpId="2" build="all"/>
-      <p:bldP spid="16" grpId="2" build="all"/>
-      <p:bldP spid="18" grpId="3" build="all"/>
-      <p:bldP spid="19" grpId="3" build="all"/>
-      <p:bldP spid="20" grpId="3" build="all"/>
-      <p:bldP spid="22" grpId="4" build="all"/>
-      <p:bldP spid="23" grpId="4" build="all"/>
-      <p:bldP spid="24" grpId="4" build="all"/>
-      <p:bldP spid="26" grpId="5" build="all"/>
-      <p:bldP spid="27" grpId="5" build="all"/>
-      <p:bldP spid="28" grpId="5" build="all"/>
+      <p:bldP spid="10" grpId="1" build="allAtOnce"/>
+      <p:bldP spid="11" grpId="1" build="allAtOnce"/>
+      <p:bldP spid="12" grpId="1" build="allAtOnce"/>
+      <p:bldP spid="14" grpId="2" build="allAtOnce"/>
+      <p:bldP spid="15" grpId="2" build="allAtOnce"/>
+      <p:bldP spid="16" grpId="2" build="allAtOnce"/>
+      <p:bldP spid="18" grpId="3" build="allAtOnce"/>
+      <p:bldP spid="19" grpId="3" build="allAtOnce"/>
+      <p:bldP spid="20" grpId="3" build="allAtOnce"/>
+      <p:bldP spid="22" grpId="4" build="allAtOnce"/>
+      <p:bldP spid="23" grpId="4" build="allAtOnce"/>
+      <p:bldP spid="24" grpId="4" build="allAtOnce"/>
+      <p:bldP spid="26" grpId="5" build="allAtOnce"/>
+      <p:bldP spid="27" grpId="5" build="allAtOnce"/>
+      <p:bldP spid="28" grpId="5" build="allAtOnce"/>
     </p:bldLst>
   </p:timing>
 </p:sld>
@@ -28900,21 +28900,21 @@
       </p:par>
     </p:tnLst>
     <p:bldLst>
-      <p:bldP spid="10" grpId="1" build="all"/>
-      <p:bldP spid="11" grpId="1" build="all"/>
-      <p:bldP spid="12" grpId="1" build="all"/>
-      <p:bldP spid="14" grpId="2" build="all"/>
-      <p:bldP spid="15" grpId="2" build="all"/>
-      <p:bldP spid="16" grpId="2" build="all"/>
-      <p:bldP spid="18" grpId="3" build="all"/>
-      <p:bldP spid="19" grpId="3" build="all"/>
-      <p:bldP spid="20" grpId="3" build="all"/>
-      <p:bldP spid="22" grpId="4" build="all"/>
-      <p:bldP spid="23" grpId="4" build="all"/>
-      <p:bldP spid="24" grpId="4" build="all"/>
-      <p:bldP spid="26" grpId="5" build="all"/>
-      <p:bldP spid="27" grpId="5" build="all"/>
-      <p:bldP spid="28" grpId="5" build="all"/>
+      <p:bldP spid="10" grpId="1" build="allAtOnce"/>
+      <p:bldP spid="11" grpId="1" build="allAtOnce"/>
+      <p:bldP spid="12" grpId="1" build="allAtOnce"/>
+      <p:bldP spid="14" grpId="2" build="allAtOnce"/>
+      <p:bldP spid="15" grpId="2" build="allAtOnce"/>
+      <p:bldP spid="16" grpId="2" build="allAtOnce"/>
+      <p:bldP spid="18" grpId="3" build="allAtOnce"/>
+      <p:bldP spid="19" grpId="3" build="allAtOnce"/>
+      <p:bldP spid="20" grpId="3" build="allAtOnce"/>
+      <p:bldP spid="22" grpId="4" build="allAtOnce"/>
+      <p:bldP spid="23" grpId="4" build="allAtOnce"/>
+      <p:bldP spid="24" grpId="4" build="allAtOnce"/>
+      <p:bldP spid="26" grpId="5" build="allAtOnce"/>
+      <p:bldP spid="27" grpId="5" build="allAtOnce"/>
+      <p:bldP spid="28" grpId="5" build="allAtOnce"/>
     </p:bldLst>
   </p:timing>
 </p:sld>
@@ -31296,21 +31296,21 @@
       </p:par>
     </p:tnLst>
     <p:bldLst>
-      <p:bldP spid="10" grpId="1" build="all"/>
-      <p:bldP spid="11" grpId="1" build="all"/>
-      <p:bldP spid="12" grpId="1" build="all"/>
-      <p:bldP spid="14" grpId="2" build="all"/>
-      <p:bldP spid="15" grpId="2" build="all"/>
-      <p:bldP spid="16" grpId="2" build="all"/>
-      <p:bldP spid="18" grpId="3" build="all"/>
-      <p:bldP spid="19" grpId="3" build="all"/>
-      <p:bldP spid="20" grpId="3" build="all"/>
-      <p:bldP spid="22" grpId="4" build="all"/>
-      <p:bldP spid="23" grpId="4" build="all"/>
-      <p:bldP spid="24" grpId="4" build="all"/>
-      <p:bldP spid="26" grpId="5" build="all"/>
-      <p:bldP spid="27" grpId="5" build="all"/>
-      <p:bldP spid="28" grpId="5" build="all"/>
+      <p:bldP spid="10" grpId="1" build="allAtOnce"/>
+      <p:bldP spid="11" grpId="1" build="allAtOnce"/>
+      <p:bldP spid="12" grpId="1" build="allAtOnce"/>
+      <p:bldP spid="14" grpId="2" build="allAtOnce"/>
+      <p:bldP spid="15" grpId="2" build="allAtOnce"/>
+      <p:bldP spid="16" grpId="2" build="allAtOnce"/>
+      <p:bldP spid="18" grpId="3" build="allAtOnce"/>
+      <p:bldP spid="19" grpId="3" build="allAtOnce"/>
+      <p:bldP spid="20" grpId="3" build="allAtOnce"/>
+      <p:bldP spid="22" grpId="4" build="allAtOnce"/>
+      <p:bldP spid="23" grpId="4" build="allAtOnce"/>
+      <p:bldP spid="24" grpId="4" build="allAtOnce"/>
+      <p:bldP spid="26" grpId="5" build="allAtOnce"/>
+      <p:bldP spid="27" grpId="5" build="allAtOnce"/>
+      <p:bldP spid="28" grpId="5" build="allAtOnce"/>
     </p:bldLst>
   </p:timing>
 </p:sld>
@@ -32982,15 +32982,15 @@
       </p:par>
     </p:tnLst>
     <p:bldLst>
-      <p:bldP spid="10" grpId="1" build="all"/>
-      <p:bldP spid="11" grpId="1" build="all"/>
-      <p:bldP spid="12" grpId="1" build="all"/>
-      <p:bldP spid="14" grpId="2" build="all"/>
-      <p:bldP spid="15" grpId="2" build="all"/>
-      <p:bldP spid="16" grpId="2" build="all"/>
-      <p:bldP spid="18" grpId="3" build="all"/>
-      <p:bldP spid="19" grpId="3" build="all"/>
-      <p:bldP spid="20" grpId="3" build="all"/>
+      <p:bldP spid="10" grpId="1" build="allAtOnce"/>
+      <p:bldP spid="11" grpId="1" build="allAtOnce"/>
+      <p:bldP spid="12" grpId="1" build="allAtOnce"/>
+      <p:bldP spid="14" grpId="2" build="allAtOnce"/>
+      <p:bldP spid="15" grpId="2" build="allAtOnce"/>
+      <p:bldP spid="16" grpId="2" build="allAtOnce"/>
+      <p:bldP spid="18" grpId="3" build="allAtOnce"/>
+      <p:bldP spid="19" grpId="3" build="allAtOnce"/>
+      <p:bldP spid="20" grpId="3" build="allAtOnce"/>
     </p:bldLst>
   </p:timing>
 </p:sld>
